--- a/assets/pptx/catalog-775.pptx
+++ b/assets/pptx/catalog-775.pptx
@@ -3477,7 +3477,7 @@
                 <a:ea typeface="Ebrima"/>
                 <a:cs typeface="Ebrima"/>
               </a:rPr>
-              <a:t>(2x)</a:t>
+              <a:t>2x</a:t>
             </a:r>
           </a:p>
         </p:txBody>
@@ -3544,7 +3544,7 @@
                 <a:ea typeface="Ebrima"/>
                 <a:cs typeface="Ebrima"/>
               </a:rPr>
-              <a:t>ሰው ቢጥል እግዚአብሔር ያነሳል (ሰው ቢጥል)</a:t>
+              <a:t>ሰው ቢጥል እግዚአብሔር ያነሳል ሰው ቢጥል</a:t>
             </a:r>
           </a:p>
         </p:txBody>
@@ -3745,7 +3745,7 @@
                 <a:ea typeface="Ebrima"/>
                 <a:cs typeface="Ebrima"/>
               </a:rPr>
-              <a:t>ሰው ቢጥል እግዚአብሔር ያነሳል (ሰው ቢጥል) (2x)</a:t>
+              <a:t>ሰው ቢጥል እግዚአብሔር ያነሳል ሰው ቢጥል 2x</a:t>
             </a:r>
           </a:p>
         </p:txBody>
@@ -4013,7 +4013,7 @@
                 <a:ea typeface="Ebrima"/>
                 <a:cs typeface="Ebrima"/>
               </a:rPr>
-              <a:t>(2x)</a:t>
+              <a:t>2x</a:t>
             </a:r>
           </a:p>
         </p:txBody>
@@ -4147,7 +4147,7 @@
                 <a:ea typeface="Ebrima"/>
                 <a:cs typeface="Ebrima"/>
               </a:rPr>
-              <a:t>ግድ ማይለው (2x)</a:t>
+              <a:t>ግድ ማይለው 2x</a:t>
             </a:r>
           </a:p>
         </p:txBody>
@@ -4482,7 +4482,7 @@
                 <a:ea typeface="Ebrima"/>
                 <a:cs typeface="Ebrima"/>
               </a:rPr>
-              <a:t>አባት አለኝ እኔ አባት አለኝ (2x)</a:t>
+              <a:t>አባት አለኝ እኔ አባት አለኝ 2x</a:t>
             </a:r>
           </a:p>
         </p:txBody>
@@ -4549,7 +4549,7 @@
                 <a:ea typeface="Ebrima"/>
                 <a:cs typeface="Ebrima"/>
               </a:rPr>
-              <a:t>ረዳት አለኝ እኔ ረዳት አለኝ (2x)</a:t>
+              <a:t>ረዳት አለኝ እኔ ረዳት አለኝ 2x</a:t>
             </a:r>
           </a:p>
         </p:txBody>
@@ -4616,7 +4616,7 @@
                 <a:ea typeface="Ebrima"/>
                 <a:cs typeface="Ebrima"/>
               </a:rPr>
-              <a:t>የምስኪን ወዳጅ ሆነህ በጐጆዬ ውስጥ ገባህ (አሃሃ አሃ)</a:t>
+              <a:t>የምስኪን ወዳጅ ሆነህ በጐጆዬ ውስጥ ገባህ አሃሃ አሃ</a:t>
             </a:r>
           </a:p>
         </p:txBody>
@@ -4817,7 +4817,7 @@
                 <a:ea typeface="Ebrima"/>
                 <a:cs typeface="Ebrima"/>
               </a:rPr>
-              <a:t>ታዲያ ልዘምር እንጂ ለምን ላጉረምርም (አሃሃ አሃ)</a:t>
+              <a:t>ታዲያ ልዘምር እንጂ ለምን ላጉረምርም አሃሃ አሃ</a:t>
             </a:r>
           </a:p>
         </p:txBody>
@@ -5152,7 +5152,7 @@
                 <a:ea typeface="Ebrima"/>
                 <a:cs typeface="Ebrima"/>
               </a:rPr>
-              <a:t>አባት አለኝ እኔ አባት አለኝ (2x)</a:t>
+              <a:t>አባት አለኝ እኔ አባት አለኝ 2x</a:t>
             </a:r>
           </a:p>
         </p:txBody>
@@ -5219,7 +5219,7 @@
                 <a:ea typeface="Ebrima"/>
                 <a:cs typeface="Ebrima"/>
               </a:rPr>
-              <a:t>ረዳት አለኝ እኔ ረዳት አለኝ (2x)</a:t>
+              <a:t>ረዳት አለኝ እኔ ረዳት አለኝ 2x</a:t>
             </a:r>
           </a:p>
         </p:txBody>
@@ -5353,7 +5353,7 @@
                 <a:ea typeface="Ebrima"/>
                 <a:cs typeface="Ebrima"/>
               </a:rPr>
-              <a:t>(2x)</a:t>
+              <a:t>2x</a:t>
             </a:r>
           </a:p>
         </p:txBody>
@@ -5420,7 +5420,7 @@
                 <a:ea typeface="Ebrima"/>
                 <a:cs typeface="Ebrima"/>
               </a:rPr>
-              <a:t>ረዳት አለኝ እኔ ረዳት አለኝ (2x)</a:t>
+              <a:t>ረዳት አለኝ እኔ ረዳት አለኝ 2x</a:t>
             </a:r>
           </a:p>
         </p:txBody>
@@ -5487,7 +5487,7 @@
                 <a:ea typeface="Ebrima"/>
                 <a:cs typeface="Ebrima"/>
               </a:rPr>
-              <a:t>ከእናት ካባቴም በላይ ለኔ ራርተህ ስላየሁ (አሃሃ አሃ)</a:t>
+              <a:t>ከእናት ካባቴም በላይ ለኔ ራርተህ ስላየሁ አሃሃ አሃ</a:t>
             </a:r>
           </a:p>
         </p:txBody>
@@ -5621,7 +5621,7 @@
                 <a:ea typeface="Ebrima"/>
                 <a:cs typeface="Ebrima"/>
               </a:rPr>
-              <a:t>ስደክም አበርትተህ ራሴን በዘይት ቀባህ (አሃሃ አሃ)</a:t>
+              <a:t>ስደክም አበርትተህ ራሴን በዘይት ቀባህ አሃሃ አሃ</a:t>
             </a:r>
           </a:p>
         </p:txBody>
